--- a/exports/Nexus_Production_Deep_Dive.pptx
+++ b/exports/Nexus_Production_Deep_Dive.pptx
@@ -3996,13 +3996,19 @@
           <a:p>
             <a:pPr/>
             <a:r>
-              <a:t>Support teams lose context across chat/voice/internal tools.</a:t>
+              <a:t>CX teams lose speed and accuracy when chat, voice, and internal tools are siloed.</a:t>
             </a:r>
           </a:p>
           <a:p>
             <a:pPr/>
             <a:r>
-              <a:t>Nexus provides one orchestrator and one console for all channels.</a:t>
+              <a:t>Nexus provides one orchestrator and one console for customer + agent workflows across channels.</a:t>
+            </a:r>
+          </a:p>
+          <a:p>
+            <a:pPr/>
+            <a:r>
+              <a:t>Outcomes: faster resolutions, consistent quality, and full operational visibility.</a:t>
             </a:r>
           </a:p>
           <a:p>
@@ -4047,7 +4053,7 @@
           <a:lstStyle/>
           <a:p>
             <a:r>
-              <a:t>What We Built</a:t>
+              <a:t>What We Do (Agentic CX)</a:t>
             </a:r>
           </a:p>
         </p:txBody>
@@ -4069,25 +4075,25 @@
           <a:p>
             <a:pPr/>
             <a:r>
-              <a:t>Chat: customer conversation + sessions + tool-calling</a:t>
+              <a:t>AI Agents for Customers: resolve chat/voice inquiries end-to-end (intake → execute → follow-up)</a:t>
             </a:r>
           </a:p>
           <a:p>
             <a:pPr/>
             <a:r>
-              <a:t>Copilot: agent-assist drafting / summarization for humans</a:t>
+              <a:t>AI Agents for Frontline Teams: copilot assistance with context + next-best actions + drafts</a:t>
             </a:r>
           </a:p>
           <a:p>
             <a:pPr/>
             <a:r>
-              <a:t>Voice: simulation + telephony hooks (Twilio-ready)</a:t>
+              <a:t>AI Agents for Operations: evaluation, insights, and continuous improvement loops</a:t>
             </a:r>
           </a:p>
           <a:p>
             <a:pPr/>
             <a:r>
-              <a:t>RAG: Chroma persistence for knowledge retrieval</a:t>
+              <a:t>Shared knowledge layer: RAG retrieval with persistence (Chroma), citations, and guardrails</a:t>
             </a:r>
           </a:p>
         </p:txBody>
